--- a/ClarkFest Poster/Tamen ClarkFest Poster.pptx
+++ b/ClarkFest Poster/Tamen ClarkFest Poster.pptx
@@ -142,12 +142,12 @@
   <pc:docChgLst>
     <pc:chgData name="Tamen, Jonathan" userId="51c4b763-5c25-4379-9ad5-5c8478177cd6" providerId="ADAL" clId="{E557B79F-C3F8-557B-BAA8-0B175C85F61C}"/>
     <pc:docChg chg="undo redo custSel addSld delSld modSld">
-      <pc:chgData name="Tamen, Jonathan" userId="51c4b763-5c25-4379-9ad5-5c8478177cd6" providerId="ADAL" clId="{E557B79F-C3F8-557B-BAA8-0B175C85F61C}" dt="2026-04-12T21:48:23.420" v="7590" actId="20577"/>
+      <pc:chgData name="Tamen, Jonathan" userId="51c4b763-5c25-4379-9ad5-5c8478177cd6" providerId="ADAL" clId="{E557B79F-C3F8-557B-BAA8-0B175C85F61C}" dt="2026-04-23T15:57:16.414" v="7599" actId="120"/>
       <pc:docMkLst>
         <pc:docMk/>
       </pc:docMkLst>
       <pc:sldChg chg="addSp delSp modSp mod">
-        <pc:chgData name="Tamen, Jonathan" userId="51c4b763-5c25-4379-9ad5-5c8478177cd6" providerId="ADAL" clId="{E557B79F-C3F8-557B-BAA8-0B175C85F61C}" dt="2026-04-12T21:48:23.420" v="7590" actId="20577"/>
+        <pc:chgData name="Tamen, Jonathan" userId="51c4b763-5c25-4379-9ad5-5c8478177cd6" providerId="ADAL" clId="{E557B79F-C3F8-557B-BAA8-0B175C85F61C}" dt="2026-04-23T15:57:16.414" v="7599" actId="120"/>
         <pc:sldMkLst>
           <pc:docMk/>
           <pc:sldMk cId="0" sldId="256"/>
@@ -201,19 +201,11 @@
           </ac:spMkLst>
         </pc:spChg>
         <pc:spChg chg="add mod">
-          <ac:chgData name="Tamen, Jonathan" userId="51c4b763-5c25-4379-9ad5-5c8478177cd6" providerId="ADAL" clId="{E557B79F-C3F8-557B-BAA8-0B175C85F61C}" dt="2026-04-12T19:25:10.734" v="7485" actId="14100"/>
+          <ac:chgData name="Tamen, Jonathan" userId="51c4b763-5c25-4379-9ad5-5c8478177cd6" providerId="ADAL" clId="{E557B79F-C3F8-557B-BAA8-0B175C85F61C}" dt="2026-04-23T15:56:54.748" v="7592" actId="20577"/>
           <ac:spMkLst>
             <pc:docMk/>
             <pc:sldMk cId="0" sldId="256"/>
             <ac:spMk id="14" creationId="{6CD1291D-AE0B-45A9-0B6E-B7D6139CE660}"/>
-          </ac:spMkLst>
-        </pc:spChg>
-        <pc:spChg chg="add mod">
-          <ac:chgData name="Tamen, Jonathan" userId="51c4b763-5c25-4379-9ad5-5c8478177cd6" providerId="ADAL" clId="{E557B79F-C3F8-557B-BAA8-0B175C85F61C}" dt="2026-04-12T19:24:41.286" v="7479"/>
-          <ac:spMkLst>
-            <pc:docMk/>
-            <pc:sldMk cId="0" sldId="256"/>
-            <ac:spMk id="17" creationId="{A67A9260-B5A2-24F3-7368-94FE7A38B4F2}"/>
           </ac:spMkLst>
         </pc:spChg>
         <pc:spChg chg="add mod">
@@ -265,7 +257,7 @@
           </ac:spMkLst>
         </pc:spChg>
         <pc:spChg chg="add mod">
-          <ac:chgData name="Tamen, Jonathan" userId="51c4b763-5c25-4379-9ad5-5c8478177cd6" providerId="ADAL" clId="{E557B79F-C3F8-557B-BAA8-0B175C85F61C}" dt="2026-04-12T21:47:36.523" v="7530" actId="20577"/>
+          <ac:chgData name="Tamen, Jonathan" userId="51c4b763-5c25-4379-9ad5-5c8478177cd6" providerId="ADAL" clId="{E557B79F-C3F8-557B-BAA8-0B175C85F61C}" dt="2026-04-23T15:57:16.414" v="7599" actId="120"/>
           <ac:spMkLst>
             <pc:docMk/>
             <pc:sldMk cId="0" sldId="256"/>
@@ -304,14 +296,6 @@
             <ac:graphicFrameMk id="16" creationId="{8E720955-3A5D-FA9B-5AB5-1E0A202E2F00}"/>
           </ac:graphicFrameMkLst>
         </pc:graphicFrameChg>
-        <pc:picChg chg="add del mod">
-          <ac:chgData name="Tamen, Jonathan" userId="51c4b763-5c25-4379-9ad5-5c8478177cd6" providerId="ADAL" clId="{E557B79F-C3F8-557B-BAA8-0B175C85F61C}" dt="2026-04-12T18:58:59.917" v="7021" actId="478"/>
-          <ac:picMkLst>
-            <pc:docMk/>
-            <pc:sldMk cId="0" sldId="256"/>
-            <ac:picMk id="6" creationId="{9E1ACDE1-7808-4FC1-8D73-467F13FD5372}"/>
-          </ac:picMkLst>
-        </pc:picChg>
         <pc:picChg chg="add mod">
           <ac:chgData name="Tamen, Jonathan" userId="51c4b763-5c25-4379-9ad5-5c8478177cd6" providerId="ADAL" clId="{E557B79F-C3F8-557B-BAA8-0B175C85F61C}" dt="2026-04-12T19:18:02.965" v="7164" actId="208"/>
           <ac:picMkLst>
@@ -320,28 +304,12 @@
             <ac:picMk id="11" creationId="{4CDF0CF3-5966-AD46-79E3-E458EFD3C6F7}"/>
           </ac:picMkLst>
         </pc:picChg>
-        <pc:picChg chg="add del mod">
-          <ac:chgData name="Tamen, Jonathan" userId="51c4b763-5c25-4379-9ad5-5c8478177cd6" providerId="ADAL" clId="{E557B79F-C3F8-557B-BAA8-0B175C85F61C}" dt="2026-04-12T19:23:38.256" v="7420" actId="478"/>
-          <ac:picMkLst>
-            <pc:docMk/>
-            <pc:sldMk cId="0" sldId="256"/>
-            <ac:picMk id="13" creationId="{0F8BF253-5C0B-E41C-18B9-DB07E934A8F9}"/>
-          </ac:picMkLst>
-        </pc:picChg>
         <pc:picChg chg="add mod">
           <ac:chgData name="Tamen, Jonathan" userId="51c4b763-5c25-4379-9ad5-5c8478177cd6" providerId="ADAL" clId="{E557B79F-C3F8-557B-BAA8-0B175C85F61C}" dt="2026-04-09T21:55:13.613" v="6361" actId="1076"/>
           <ac:picMkLst>
             <pc:docMk/>
             <pc:sldMk cId="0" sldId="256"/>
             <ac:picMk id="15" creationId="{C7224971-EC99-C73C-EF8A-8FE7F433509E}"/>
-          </ac:picMkLst>
-        </pc:picChg>
-        <pc:picChg chg="add del mod">
-          <ac:chgData name="Tamen, Jonathan" userId="51c4b763-5c25-4379-9ad5-5c8478177cd6" providerId="ADAL" clId="{E557B79F-C3F8-557B-BAA8-0B175C85F61C}" dt="2026-04-12T18:56:34.678" v="6897" actId="478"/>
-          <ac:picMkLst>
-            <pc:docMk/>
-            <pc:sldMk cId="0" sldId="256"/>
-            <ac:picMk id="21" creationId="{49FC7BA1-C70D-12D9-E59B-65C60449C06F}"/>
           </ac:picMkLst>
         </pc:picChg>
         <pc:picChg chg="mod">
@@ -440,7 +408,7 @@
           <a:p>
             <a:fld id="{C868516E-7ECC-4146-BD33-0798B9E44489}" type="datetimeFigureOut">
               <a:rPr lang="en-US" smtClean="0"/>
-              <a:t>4/12/26</a:t>
+              <a:t>4/23/26</a:t>
             </a:fld>
             <a:endParaRPr lang="en-US"/>
           </a:p>
@@ -971,7 +939,7 @@
             <a:fld id="{85A44E54-DA80-4FE2-8F03-CB9C1FF639FA}" type="datetimeFigureOut">
               <a:rPr lang="en-US" smtClean="0"/>
               <a:pPr/>
-              <a:t>4/12/26</a:t>
+              <a:t>4/23/26</a:t>
             </a:fld>
             <a:endParaRPr lang="en-US"/>
           </a:p>
@@ -1136,7 +1104,7 @@
             <a:fld id="{85A44E54-DA80-4FE2-8F03-CB9C1FF639FA}" type="datetimeFigureOut">
               <a:rPr lang="en-US" smtClean="0"/>
               <a:pPr/>
-              <a:t>4/12/26</a:t>
+              <a:t>4/23/26</a:t>
             </a:fld>
             <a:endParaRPr lang="en-US"/>
           </a:p>
@@ -1311,7 +1279,7 @@
             <a:fld id="{85A44E54-DA80-4FE2-8F03-CB9C1FF639FA}" type="datetimeFigureOut">
               <a:rPr lang="en-US" smtClean="0"/>
               <a:pPr/>
-              <a:t>4/12/26</a:t>
+              <a:t>4/23/26</a:t>
             </a:fld>
             <a:endParaRPr lang="en-US"/>
           </a:p>
@@ -1476,7 +1444,7 @@
             <a:fld id="{85A44E54-DA80-4FE2-8F03-CB9C1FF639FA}" type="datetimeFigureOut">
               <a:rPr lang="en-US" smtClean="0"/>
               <a:pPr/>
-              <a:t>4/12/26</a:t>
+              <a:t>4/23/26</a:t>
             </a:fld>
             <a:endParaRPr lang="en-US"/>
           </a:p>
@@ -1718,7 +1686,7 @@
             <a:fld id="{85A44E54-DA80-4FE2-8F03-CB9C1FF639FA}" type="datetimeFigureOut">
               <a:rPr lang="en-US" smtClean="0"/>
               <a:pPr/>
-              <a:t>4/12/26</a:t>
+              <a:t>4/23/26</a:t>
             </a:fld>
             <a:endParaRPr lang="en-US"/>
           </a:p>
@@ -2000,7 +1968,7 @@
             <a:fld id="{85A44E54-DA80-4FE2-8F03-CB9C1FF639FA}" type="datetimeFigureOut">
               <a:rPr lang="en-US" smtClean="0"/>
               <a:pPr/>
-              <a:t>4/12/26</a:t>
+              <a:t>4/23/26</a:t>
             </a:fld>
             <a:endParaRPr lang="en-US"/>
           </a:p>
@@ -2416,7 +2384,7 @@
             <a:fld id="{85A44E54-DA80-4FE2-8F03-CB9C1FF639FA}" type="datetimeFigureOut">
               <a:rPr lang="en-US" smtClean="0"/>
               <a:pPr/>
-              <a:t>4/12/26</a:t>
+              <a:t>4/23/26</a:t>
             </a:fld>
             <a:endParaRPr lang="en-US"/>
           </a:p>
@@ -2530,7 +2498,7 @@
             <a:fld id="{85A44E54-DA80-4FE2-8F03-CB9C1FF639FA}" type="datetimeFigureOut">
               <a:rPr lang="en-US" smtClean="0"/>
               <a:pPr/>
-              <a:t>4/12/26</a:t>
+              <a:t>4/23/26</a:t>
             </a:fld>
             <a:endParaRPr lang="en-US"/>
           </a:p>
@@ -2622,7 +2590,7 @@
             <a:fld id="{85A44E54-DA80-4FE2-8F03-CB9C1FF639FA}" type="datetimeFigureOut">
               <a:rPr lang="en-US" smtClean="0"/>
               <a:pPr/>
-              <a:t>4/12/26</a:t>
+              <a:t>4/23/26</a:t>
             </a:fld>
             <a:endParaRPr lang="en-US"/>
           </a:p>
@@ -2894,7 +2862,7 @@
             <a:fld id="{85A44E54-DA80-4FE2-8F03-CB9C1FF639FA}" type="datetimeFigureOut">
               <a:rPr lang="en-US" smtClean="0"/>
               <a:pPr/>
-              <a:t>4/12/26</a:t>
+              <a:t>4/23/26</a:t>
             </a:fld>
             <a:endParaRPr lang="en-US"/>
           </a:p>
@@ -3143,7 +3111,7 @@
             <a:fld id="{85A44E54-DA80-4FE2-8F03-CB9C1FF639FA}" type="datetimeFigureOut">
               <a:rPr lang="en-US" smtClean="0"/>
               <a:pPr/>
-              <a:t>4/12/26</a:t>
+              <a:t>4/23/26</a:t>
             </a:fld>
             <a:endParaRPr lang="en-US"/>
           </a:p>
@@ -3351,7 +3319,7 @@
             <a:fld id="{85A44E54-DA80-4FE2-8F03-CB9C1FF639FA}" type="datetimeFigureOut">
               <a:rPr lang="en-US" smtClean="0"/>
               <a:pPr/>
-              <a:t>4/12/26</a:t>
+              <a:t>4/23/26</a:t>
             </a:fld>
             <a:endParaRPr lang="en-US"/>
           </a:p>
@@ -3981,8 +3949,8 @@
           </a:p>
         </p:txBody>
       </p:sp>
-      <mc:AlternateContent xmlns:mc="http://schemas.openxmlformats.org/markup-compatibility/2006">
-        <mc:Choice xmlns:a14="http://schemas.microsoft.com/office/drawing/2010/main" Requires="a14">
+      <mc:AlternateContent xmlns:mc="http://schemas.openxmlformats.org/markup-compatibility/2006" xmlns:a14="http://schemas.microsoft.com/office/drawing/2010/main">
+        <mc:Choice Requires="a14">
           <p:sp>
             <p:nvSpPr>
               <p:cNvPr id="9" name="Rectangle 8"/>
@@ -5549,7 +5517,7 @@
             </p:txBody>
           </p:sp>
         </mc:Choice>
-        <mc:Fallback>
+        <mc:Fallback xmlns="">
           <p:sp>
             <p:nvSpPr>
               <p:cNvPr id="9" name="Rectangle 8"/>
@@ -14016,21 +13984,8 @@
                 <a:ea typeface="Tahoma" panose="020B0604030504040204" pitchFamily="34" charset="0"/>
                 <a:cs typeface="Tahoma" panose="020B0604030504040204" pitchFamily="34" charset="0"/>
               </a:rPr>
-              <a:t> percentage point</a:t>
+              <a:t>%</a:t>
             </a:r>
-            <a:r>
-              <a:rPr lang="el-GR" sz="2000" b="1" dirty="0">
-                <a:latin typeface="Tahoma" panose="020B0604030504040204" pitchFamily="34" charset="0"/>
-                <a:ea typeface="Tahoma" panose="020B0604030504040204" pitchFamily="34" charset="0"/>
-                <a:cs typeface="Tahoma" panose="020B0604030504040204" pitchFamily="34" charset="0"/>
-              </a:rPr>
-              <a:t> </a:t>
-            </a:r>
-            <a:endParaRPr lang="el-GR" sz="2000" dirty="0">
-              <a:latin typeface="Tahoma" panose="020B0604030504040204" pitchFamily="34" charset="0"/>
-              <a:ea typeface="Tahoma" panose="020B0604030504040204" pitchFamily="34" charset="0"/>
-              <a:cs typeface="Tahoma" panose="020B0604030504040204" pitchFamily="34" charset="0"/>
-            </a:endParaRPr>
           </a:p>
           <a:p>
             <a:r>
@@ -16942,7 +16897,7 @@
                 <a:ea typeface="Tahoma" panose="020B0604030504040204" pitchFamily="34" charset="0"/>
                 <a:cs typeface="Tahoma" panose="020B0604030504040204" pitchFamily="34" charset="0"/>
               </a:rPr>
-              <a:t>Effect = β * 100%</a:t>
+              <a:t>Effect = β%</a:t>
             </a:r>
           </a:p>
           <a:p>
